--- a/ver65_ver85_capability_comparison.pptx
+++ b/ver65_ver85_capability_comparison.pptx
@@ -1,110 +1,110 @@
 
 <file path=ppt/presentation.xml><?xml version="1.0" encoding="utf-8"?>
-<p:presentation xmlns:a="http://schemas.openxmlformats.org/drawingml/2006/main" xmlns:r="http://schemas.openxmlformats.org/officeDocument/2006/relationships" xmlns:p="http://schemas.openxmlformats.org/presentationml/2006/main" saveSubsetFonts="1" autoCompressPictures="0">
-  <p:sldMasterIdLst>
-    <p:sldMasterId id="2147483648" r:id="rId1"/>
-  </p:sldMasterIdLst>
-  <p:sldIdLst>
-    <p:sldId id="256" r:id="rId7"/>
-  </p:sldIdLst>
-  <p:sldSz cx="12191695" cy="6858000" type="screen4x3"/>
-  <p:notesSz cx="6858000" cy="9144000"/>
-  <p:defaultTextStyle>
-    <a:defPPr>
-      <a:defRPr lang="en-US"/>
-    </a:defPPr>
-    <a:lvl1pPr marL="0" algn="l" defTabSz="457200" rtl="0" eaLnBrk="1" latinLnBrk="0" hangingPunct="1">
-      <a:defRPr sz="1800" kern="1200">
-        <a:solidFill>
-          <a:schemeClr val="tx1"/>
-        </a:solidFill>
-        <a:latin typeface="+mn-lt"/>
-        <a:ea typeface="+mn-ea"/>
-        <a:cs typeface="+mn-cs"/>
-      </a:defRPr>
-    </a:lvl1pPr>
-    <a:lvl2pPr marL="457200" algn="l" defTabSz="457200" rtl="0" eaLnBrk="1" latinLnBrk="0" hangingPunct="1">
-      <a:defRPr sz="1800" kern="1200">
-        <a:solidFill>
-          <a:schemeClr val="tx1"/>
-        </a:solidFill>
-        <a:latin typeface="+mn-lt"/>
-        <a:ea typeface="+mn-ea"/>
-        <a:cs typeface="+mn-cs"/>
-      </a:defRPr>
-    </a:lvl2pPr>
-    <a:lvl3pPr marL="914400" algn="l" defTabSz="457200" rtl="0" eaLnBrk="1" latinLnBrk="0" hangingPunct="1">
-      <a:defRPr sz="1800" kern="1200">
-        <a:solidFill>
-          <a:schemeClr val="tx1"/>
-        </a:solidFill>
-        <a:latin typeface="+mn-lt"/>
-        <a:ea typeface="+mn-ea"/>
-        <a:cs typeface="+mn-cs"/>
-      </a:defRPr>
-    </a:lvl3pPr>
-    <a:lvl4pPr marL="1371600" algn="l" defTabSz="457200" rtl="0" eaLnBrk="1" latinLnBrk="0" hangingPunct="1">
-      <a:defRPr sz="1800" kern="1200">
-        <a:solidFill>
-          <a:schemeClr val="tx1"/>
-        </a:solidFill>
-        <a:latin typeface="+mn-lt"/>
-        <a:ea typeface="+mn-ea"/>
-        <a:cs typeface="+mn-cs"/>
-      </a:defRPr>
-    </a:lvl4pPr>
-    <a:lvl5pPr marL="1828800" algn="l" defTabSz="457200" rtl="0" eaLnBrk="1" latinLnBrk="0" hangingPunct="1">
-      <a:defRPr sz="1800" kern="1200">
-        <a:solidFill>
-          <a:schemeClr val="tx1"/>
-        </a:solidFill>
-        <a:latin typeface="+mn-lt"/>
-        <a:ea typeface="+mn-ea"/>
-        <a:cs typeface="+mn-cs"/>
-      </a:defRPr>
-    </a:lvl5pPr>
-    <a:lvl6pPr marL="2286000" algn="l" defTabSz="457200" rtl="0" eaLnBrk="1" latinLnBrk="0" hangingPunct="1">
-      <a:defRPr sz="1800" kern="1200">
-        <a:solidFill>
-          <a:schemeClr val="tx1"/>
-        </a:solidFill>
-        <a:latin typeface="+mn-lt"/>
-        <a:ea typeface="+mn-ea"/>
-        <a:cs typeface="+mn-cs"/>
-      </a:defRPr>
-    </a:lvl6pPr>
-    <a:lvl7pPr marL="2743200" algn="l" defTabSz="457200" rtl="0" eaLnBrk="1" latinLnBrk="0" hangingPunct="1">
-      <a:defRPr sz="1800" kern="1200">
-        <a:solidFill>
-          <a:schemeClr val="tx1"/>
-        </a:solidFill>
-        <a:latin typeface="+mn-lt"/>
-        <a:ea typeface="+mn-ea"/>
-        <a:cs typeface="+mn-cs"/>
-      </a:defRPr>
-    </a:lvl7pPr>
-    <a:lvl8pPr marL="3200400" algn="l" defTabSz="457200" rtl="0" eaLnBrk="1" latinLnBrk="0" hangingPunct="1">
-      <a:defRPr sz="1800" kern="1200">
-        <a:solidFill>
-          <a:schemeClr val="tx1"/>
-        </a:solidFill>
-        <a:latin typeface="+mn-lt"/>
-        <a:ea typeface="+mn-ea"/>
-        <a:cs typeface="+mn-cs"/>
-      </a:defRPr>
-    </a:lvl8pPr>
-    <a:lvl9pPr marL="3657600" algn="l" defTabSz="457200" rtl="0" eaLnBrk="1" latinLnBrk="0" hangingPunct="1">
-      <a:defRPr sz="1800" kern="1200">
-        <a:solidFill>
-          <a:schemeClr val="tx1"/>
-        </a:solidFill>
-        <a:latin typeface="+mn-lt"/>
-        <a:ea typeface="+mn-ea"/>
-        <a:cs typeface="+mn-cs"/>
-      </a:defRPr>
-    </a:lvl9pPr>
-  </p:defaultTextStyle>
-</p:presentation>
+<ns0:presentation xmlns:ns0="http://schemas.openxmlformats.org/presentationml/2006/main" xmlns:ns1="http://schemas.openxmlformats.org/officeDocument/2006/relationships" xmlns:ns2="http://schemas.openxmlformats.org/drawingml/2006/main" saveSubsetFonts="1" autoCompressPictures="0">
+  <ns0:sldMasterIdLst>
+    <ns0:sldMasterId id="2147483648" ns1:id="rId1"/>
+  </ns0:sldMasterIdLst>
+  <ns0:sldIdLst>
+    <ns0:sldId id="256" ns1:id="rId7"/>
+  </ns0:sldIdLst>
+  <ns0:sldSz cx="12191695" cy="6858000" type="screen4x3"/>
+  <ns0:notesSz cx="6858000" cy="9144000"/>
+  <ns0:defaultTextStyle>
+    <ns2:defPPr>
+      <ns2:defRPr lang="en-US"/>
+    </ns2:defPPr>
+    <ns2:lvl1pPr marL="0" algn="l" defTabSz="457200" rtl="0" eaLnBrk="1" latinLnBrk="0" hangingPunct="1">
+      <ns2:defRPr sz="1800" kern="1200">
+        <ns2:solidFill>
+          <ns2:schemeClr val="tx1"/>
+        </ns2:solidFill>
+        <ns2:latin typeface="+mn-lt"/>
+        <ns2:ea typeface="+mn-ea"/>
+        <ns2:cs typeface="+mn-cs"/>
+      </ns2:defRPr>
+    </ns2:lvl1pPr>
+    <ns2:lvl2pPr marL="457200" algn="l" defTabSz="457200" rtl="0" eaLnBrk="1" latinLnBrk="0" hangingPunct="1">
+      <ns2:defRPr sz="1800" kern="1200">
+        <ns2:solidFill>
+          <ns2:schemeClr val="tx1"/>
+        </ns2:solidFill>
+        <ns2:latin typeface="+mn-lt"/>
+        <ns2:ea typeface="+mn-ea"/>
+        <ns2:cs typeface="+mn-cs"/>
+      </ns2:defRPr>
+    </ns2:lvl2pPr>
+    <ns2:lvl3pPr marL="914400" algn="l" defTabSz="457200" rtl="0" eaLnBrk="1" latinLnBrk="0" hangingPunct="1">
+      <ns2:defRPr sz="1800" kern="1200">
+        <ns2:solidFill>
+          <ns2:schemeClr val="tx1"/>
+        </ns2:solidFill>
+        <ns2:latin typeface="+mn-lt"/>
+        <ns2:ea typeface="+mn-ea"/>
+        <ns2:cs typeface="+mn-cs"/>
+      </ns2:defRPr>
+    </ns2:lvl3pPr>
+    <ns2:lvl4pPr marL="1371600" algn="l" defTabSz="457200" rtl="0" eaLnBrk="1" latinLnBrk="0" hangingPunct="1">
+      <ns2:defRPr sz="1800" kern="1200">
+        <ns2:solidFill>
+          <ns2:schemeClr val="tx1"/>
+        </ns2:solidFill>
+        <ns2:latin typeface="+mn-lt"/>
+        <ns2:ea typeface="+mn-ea"/>
+        <ns2:cs typeface="+mn-cs"/>
+      </ns2:defRPr>
+    </ns2:lvl4pPr>
+    <ns2:lvl5pPr marL="1828800" algn="l" defTabSz="457200" rtl="0" eaLnBrk="1" latinLnBrk="0" hangingPunct="1">
+      <ns2:defRPr sz="1800" kern="1200">
+        <ns2:solidFill>
+          <ns2:schemeClr val="tx1"/>
+        </ns2:solidFill>
+        <ns2:latin typeface="+mn-lt"/>
+        <ns2:ea typeface="+mn-ea"/>
+        <ns2:cs typeface="+mn-cs"/>
+      </ns2:defRPr>
+    </ns2:lvl5pPr>
+    <ns2:lvl6pPr marL="2286000" algn="l" defTabSz="457200" rtl="0" eaLnBrk="1" latinLnBrk="0" hangingPunct="1">
+      <ns2:defRPr sz="1800" kern="1200">
+        <ns2:solidFill>
+          <ns2:schemeClr val="tx1"/>
+        </ns2:solidFill>
+        <ns2:latin typeface="+mn-lt"/>
+        <ns2:ea typeface="+mn-ea"/>
+        <ns2:cs typeface="+mn-cs"/>
+      </ns2:defRPr>
+    </ns2:lvl6pPr>
+    <ns2:lvl7pPr marL="2743200" algn="l" defTabSz="457200" rtl="0" eaLnBrk="1" latinLnBrk="0" hangingPunct="1">
+      <ns2:defRPr sz="1800" kern="1200">
+        <ns2:solidFill>
+          <ns2:schemeClr val="tx1"/>
+        </ns2:solidFill>
+        <ns2:latin typeface="+mn-lt"/>
+        <ns2:ea typeface="+mn-ea"/>
+        <ns2:cs typeface="+mn-cs"/>
+      </ns2:defRPr>
+    </ns2:lvl7pPr>
+    <ns2:lvl8pPr marL="3200400" algn="l" defTabSz="457200" rtl="0" eaLnBrk="1" latinLnBrk="0" hangingPunct="1">
+      <ns2:defRPr sz="1800" kern="1200">
+        <ns2:solidFill>
+          <ns2:schemeClr val="tx1"/>
+        </ns2:solidFill>
+        <ns2:latin typeface="+mn-lt"/>
+        <ns2:ea typeface="+mn-ea"/>
+        <ns2:cs typeface="+mn-cs"/>
+      </ns2:defRPr>
+    </ns2:lvl8pPr>
+    <ns2:lvl9pPr marL="3657600" algn="l" defTabSz="457200" rtl="0" eaLnBrk="1" latinLnBrk="0" hangingPunct="1">
+      <ns2:defRPr sz="1800" kern="1200">
+        <ns2:solidFill>
+          <ns2:schemeClr val="tx1"/>
+        </ns2:solidFill>
+        <ns2:latin typeface="+mn-lt"/>
+        <ns2:ea typeface="+mn-ea"/>
+        <ns2:cs typeface="+mn-cs"/>
+      </ns2:defRPr>
+    </ns2:lvl9pPr>
+  </ns0:defaultTextStyle>
+</ns0:presentation>
 </file>
 
 <file path=ppt/slideLayouts/slideLayout1.xml><?xml version="1.0" encoding="utf-8"?>

--- a/ver65_ver85_capability_comparison.pptx
+++ b/ver65_ver85_capability_comparison.pptx
@@ -3143,7 +3143,6 @@
                 <a:solidFill>
                   <a:srgbClr val="2A3440"/>
                 </a:solidFill>
-                <a:latin typeface="Yu Gothic"/>
               </a:rPr>
               <a:t>実装追加により、回答できる問の範囲が拡大</a:t>
             </a:r>
@@ -3197,7 +3196,6 @@
                 <a:solidFill>
                   <a:srgbClr val="FFFFFF"/>
                 </a:solidFill>
-                <a:latin typeface="Yu Gothic"/>
               </a:rPr>
               <a:t>ver65</a:t>
             </a:r>
@@ -3251,7 +3249,6 @@
                 <a:solidFill>
                   <a:srgbClr val="FFFFFF"/>
                 </a:solidFill>
-                <a:latin typeface="Yu Gothic"/>
               </a:rPr>
               <a:t>追加実装</a:t>
             </a:r>
@@ -3305,7 +3302,6 @@
                 <a:solidFill>
                   <a:srgbClr val="FFFFFF"/>
                 </a:solidFill>
-                <a:latin typeface="Yu Gothic"/>
               </a:rPr>
               <a:t>ver85</a:t>
             </a:r>
@@ -3359,7 +3355,6 @@
                 <a:solidFill>
                   <a:srgbClr val="2A3440"/>
                 </a:solidFill>
-                <a:latin typeface="Yu Gothic"/>
               </a:rPr>
               <a:t/>
             </a:r>
@@ -3413,7 +3408,6 @@
                 <a:solidFill>
                   <a:srgbClr val="2A3440"/>
                 </a:solidFill>
-                <a:latin typeface="Yu Gothic"/>
               </a:rPr>
               <a:t/>
             </a:r>
@@ -3467,7 +3461,6 @@
                 <a:solidFill>
                   <a:srgbClr val="2A3440"/>
                 </a:solidFill>
-                <a:latin typeface="Yu Gothic"/>
               </a:rPr>
               <a:t>回答できる問の範囲</a:t>
             </a:r>
@@ -3521,7 +3514,6 @@
                 <a:solidFill>
                   <a:srgbClr val="2A3440"/>
                 </a:solidFill>
-                <a:latin typeface="Yu Gothic"/>
               </a:rPr>
               <a:t>回答できる問の範囲</a:t>
             </a:r>
@@ -3575,7 +3567,6 @@
                 <a:solidFill>
                   <a:srgbClr val="808A96"/>
                 </a:solidFill>
-                <a:latin typeface="Yu Gothic"/>
               </a:rPr>
               <a:t>ユーザの問集合</a:t>
             </a:r>
@@ -3629,7 +3620,6 @@
                 <a:solidFill>
                   <a:srgbClr val="808A96"/>
                 </a:solidFill>
-                <a:latin typeface="Yu Gothic"/>
               </a:rPr>
               <a:t>ユーザの問集合</a:t>
             </a:r>
@@ -3683,7 +3673,6 @@
                 <a:solidFill>
                   <a:srgbClr val="FFFFFF"/>
                 </a:solidFill>
-                <a:latin typeface="Yu Gothic"/>
               </a:rPr>
               <a:t>ver65
 回答可能</a:t>
@@ -3738,7 +3727,6 @@
                 <a:solidFill>
                   <a:srgbClr val="FFFFFF"/>
                 </a:solidFill>
-                <a:latin typeface="Yu Gothic"/>
               </a:rPr>
               <a:t>ver85
 回答可能</a:t>
@@ -3793,7 +3781,6 @@
                 <a:solidFill>
                   <a:srgbClr val="FFFFFF"/>
                 </a:solidFill>
-                <a:latin typeface="Yu Gothic"/>
               </a:rPr>
               <a:t>追加で
 回答可能</a:t>
@@ -3953,7 +3940,6 @@
                 <a:solidFill>
                   <a:srgbClr val="2A3440"/>
                 </a:solidFill>
-                <a:latin typeface="Yu Gothic"/>
               </a:rPr>
               <a:t>一問</a:t>
             </a:r>
@@ -4007,7 +3993,6 @@
                 <a:solidFill>
                   <a:srgbClr val="2A3440"/>
                 </a:solidFill>
-                <a:latin typeface="Yu Gothic"/>
               </a:rPr>
               <a:t>索引あり</a:t>
             </a:r>
@@ -4061,7 +4046,6 @@
                 <a:solidFill>
                   <a:srgbClr val="2A3440"/>
                 </a:solidFill>
-                <a:latin typeface="Yu Gothic"/>
               </a:rPr>
               <a:t>キーワード
 一致</a:t>
@@ -4116,7 +4100,6 @@
                 <a:solidFill>
                   <a:srgbClr val="2A3440"/>
                 </a:solidFill>
-                <a:latin typeface="Yu Gothic"/>
               </a:rPr>
               <a:t>索引なし→不明</a:t>
             </a:r>
@@ -4170,7 +4153,6 @@
                 <a:solidFill>
                   <a:srgbClr val="2A3440"/>
                 </a:solidFill>
-                <a:latin typeface="Yu Gothic"/>
               </a:rPr>
               <a:t>分解できる複数問い</a:t>
             </a:r>
@@ -4224,7 +4206,6 @@
                 <a:solidFill>
                   <a:srgbClr val="2A3440"/>
                 </a:solidFill>
-                <a:latin typeface="Yu Gothic"/>
               </a:rPr>
               <a:t>一問</a:t>
             </a:r>
@@ -4278,7 +4259,6 @@
                 <a:solidFill>
                   <a:srgbClr val="2A3440"/>
                 </a:solidFill>
-                <a:latin typeface="Yu Gothic"/>
               </a:rPr>
               <a:t>索引あり</a:t>
             </a:r>
@@ -4332,7 +4312,6 @@
                 <a:solidFill>
                   <a:srgbClr val="2A3440"/>
                 </a:solidFill>
-                <a:latin typeface="Yu Gothic"/>
               </a:rPr>
               <a:t>類義語理解</a:t>
             </a:r>
@@ -4386,7 +4365,6 @@
                 <a:solidFill>
                   <a:srgbClr val="2A3440"/>
                 </a:solidFill>
-                <a:latin typeface="Yu Gothic"/>
               </a:rPr>
               <a:t>補足情報付与</a:t>
             </a:r>
@@ -4440,7 +4418,6 @@
                 <a:solidFill>
                   <a:srgbClr val="2A3440"/>
                 </a:solidFill>
-                <a:latin typeface="Yu Gothic"/>
               </a:rPr>
               <a:t>ver65の範囲も継承</a:t>
             </a:r>
@@ -4494,7 +4471,6 @@
                 <a:solidFill>
                   <a:srgbClr val="808A96"/>
                 </a:solidFill>
-                <a:latin typeface="Yu Gothic"/>
               </a:rPr>
               <a:t>類義語理解が必要</a:t>
             </a:r>
@@ -4548,7 +4524,6 @@
                 <a:solidFill>
                   <a:srgbClr val="808A96"/>
                 </a:solidFill>
-                <a:latin typeface="Yu Gothic"/>
               </a:rPr>
               <a:t>補足情報付与が必要</a:t>
             </a:r>
@@ -4602,7 +4577,6 @@
                 <a:solidFill>
                   <a:srgbClr val="808A96"/>
                 </a:solidFill>
-                <a:latin typeface="Yu Gothic"/>
               </a:rPr>
               <a:t>分類・分解が困難</a:t>
             </a:r>
@@ -4656,7 +4630,6 @@
                 <a:solidFill>
                   <a:srgbClr val="808A96"/>
                 </a:solidFill>
-                <a:latin typeface="Yu Gothic"/>
               </a:rPr>
               <a:t>ユースケース実現</a:t>
             </a:r>
@@ -4710,7 +4683,6 @@
                 <a:solidFill>
                   <a:srgbClr val="808A96"/>
                 </a:solidFill>
-                <a:latin typeface="Yu Gothic"/>
               </a:rPr>
               <a:t>不具合</a:t>
             </a:r>
@@ -4764,7 +4736,6 @@
                 <a:solidFill>
                   <a:srgbClr val="808A96"/>
                 </a:solidFill>
-                <a:latin typeface="Yu Gothic"/>
               </a:rPr>
               <a:t>入力可能性が低い問</a:t>
             </a:r>
@@ -4818,7 +4789,6 @@
                 <a:solidFill>
                   <a:srgbClr val="808A96"/>
                 </a:solidFill>
-                <a:latin typeface="Yu Gothic"/>
               </a:rPr>
               <a:t>事前知識が必要な
 複数問い</a:t>
@@ -4873,7 +4843,6 @@
                 <a:solidFill>
                   <a:srgbClr val="2A3440"/>
                 </a:solidFill>
-                <a:latin typeface="Yu Gothic"/>
               </a:rPr>
               <a:t>実装</a:t>
             </a:r>
@@ -4927,7 +4896,6 @@
                 <a:solidFill>
                   <a:srgbClr val="2A3440"/>
                 </a:solidFill>
-                <a:latin typeface="Yu Gothic"/>
               </a:rPr>
               <a:t>追加した実装</a:t>
             </a:r>
@@ -4981,7 +4949,6 @@
                 <a:solidFill>
                   <a:srgbClr val="FFFFFF"/>
                 </a:solidFill>
-                <a:latin typeface="Yu Gothic"/>
               </a:rPr>
               <a:t>前処理</a:t>
             </a:r>
@@ -5035,7 +5002,6 @@
                 <a:solidFill>
                   <a:srgbClr val="FFFFFF"/>
                 </a:solidFill>
-                <a:latin typeface="Yu Gothic"/>
               </a:rPr>
               <a:t/>
             </a:r>
@@ -5089,7 +5055,6 @@
                 <a:solidFill>
                   <a:srgbClr val="FFFFFF"/>
                 </a:solidFill>
-                <a:latin typeface="Yu Gothic"/>
               </a:rPr>
               <a:t>RAG検索</a:t>
             </a:r>
@@ -5143,7 +5108,6 @@
                 <a:solidFill>
                   <a:srgbClr val="FFFFFF"/>
                 </a:solidFill>
-                <a:latin typeface="Yu Gothic"/>
               </a:rPr>
               <a:t/>
             </a:r>
@@ -5197,7 +5161,6 @@
                 <a:solidFill>
                   <a:srgbClr val="FFFFFF"/>
                 </a:solidFill>
-                <a:latin typeface="Yu Gothic"/>
               </a:rPr>
               <a:t>回答生成</a:t>
             </a:r>
@@ -5251,7 +5214,6 @@
                 <a:solidFill>
                   <a:srgbClr val="FFFFFF"/>
                 </a:solidFill>
-                <a:latin typeface="Yu Gothic"/>
               </a:rPr>
               <a:t/>
             </a:r>
@@ -5305,7 +5267,6 @@
                 <a:solidFill>
                   <a:srgbClr val="FFFFFF"/>
                 </a:solidFill>
-                <a:latin typeface="Yu Gothic"/>
               </a:rPr>
               <a:t>FAQ出力</a:t>
             </a:r>
@@ -5359,7 +5320,6 @@
                 <a:solidFill>
                   <a:srgbClr val="FFFFFF"/>
                 </a:solidFill>
-                <a:latin typeface="Yu Gothic"/>
               </a:rPr>
               <a:t>前処理</a:t>
             </a:r>
@@ -5413,7 +5373,6 @@
                 <a:solidFill>
                   <a:srgbClr val="FFFFFF"/>
                 </a:solidFill>
-                <a:latin typeface="Yu Gothic"/>
               </a:rPr>
               <a:t/>
             </a:r>
@@ -5467,7 +5426,6 @@
                 <a:solidFill>
                   <a:srgbClr val="FFFFFF"/>
                 </a:solidFill>
-                <a:latin typeface="Yu Gothic"/>
               </a:rPr>
               <a:t>RAG検索</a:t>
             </a:r>
@@ -5521,7 +5479,6 @@
                 <a:solidFill>
                   <a:srgbClr val="FFFFFF"/>
                 </a:solidFill>
-                <a:latin typeface="Yu Gothic"/>
               </a:rPr>
               <a:t/>
             </a:r>
@@ -5575,7 +5532,6 @@
                 <a:solidFill>
                   <a:srgbClr val="FFFFFF"/>
                 </a:solidFill>
-                <a:latin typeface="Yu Gothic"/>
               </a:rPr>
               <a:t>回答生成</a:t>
             </a:r>
@@ -5629,7 +5585,6 @@
                 <a:solidFill>
                   <a:srgbClr val="FFFFFF"/>
                 </a:solidFill>
-                <a:latin typeface="Yu Gothic"/>
               </a:rPr>
               <a:t/>
             </a:r>
@@ -5683,7 +5638,6 @@
                 <a:solidFill>
                   <a:srgbClr val="FFFFFF"/>
                 </a:solidFill>
-                <a:latin typeface="Yu Gothic"/>
               </a:rPr>
               <a:t>FAQ出力</a:t>
             </a:r>
@@ -5737,7 +5691,6 @@
                 <a:solidFill>
                   <a:srgbClr val="FFFFFF"/>
                 </a:solidFill>
-                <a:latin typeface="Yu Gothic"/>
               </a:rPr>
               <a:t>正規化</a:t>
             </a:r>
@@ -5791,7 +5744,6 @@
                 <a:solidFill>
                   <a:srgbClr val="FFFFFF"/>
                 </a:solidFill>
-                <a:latin typeface="Yu Gothic"/>
               </a:rPr>
               <a:t>会話変数定義</a:t>
             </a:r>
@@ -5845,7 +5797,6 @@
                 <a:solidFill>
                   <a:srgbClr val="FFFFFF"/>
                 </a:solidFill>
-                <a:latin typeface="Yu Gothic"/>
               </a:rPr>
               <a:t>レコメンド生成</a:t>
             </a:r>
@@ -6004,7 +5955,6 @@
                 <a:solidFill>
                   <a:srgbClr val="808A96"/>
                 </a:solidFill>
-                <a:latin typeface="Yu Gothic"/>
               </a:rPr>
               <a:t>未対応の領域：ユースケース実現 / 不具合 / 想定外入力 / 分類・分解が難しい複数問い</a:t>
             </a:r>

--- a/ver65_ver85_capability_comparison.pptx
+++ b/ver65_ver85_capability_comparison.pptx
@@ -5,7 +5,7 @@
     <ns0:sldMasterId id="2147483648" ns1:id="rId1"/>
   </ns0:sldMasterIdLst>
   <ns0:sldIdLst>
-    <ns0:sldId id="256" ns1:id="rId7"/>
+    <ns0:sldId id="256" ns1:id="rId2"/>
   </ns0:sldIdLst>
   <ns0:sldSz cx="12191695" cy="6858000" type="screen4x3"/>
   <ns0:notesSz cx="6858000" cy="9144000"/>
